--- a/Planning/Planning_visuel.pptx
+++ b/Planning/Planning_visuel.pptx
@@ -243,7 +243,7 @@
           <a:p>
             <a:fld id="{EB176464-EBC5-2646-9E5E-73A47B1E9ED9}" type="datetimeFigureOut">
               <a:rPr lang="en-CH" smtClean="0"/>
-              <a:t>05.12.2025</a:t>
+              <a:t>25.01.2026</a:t>
             </a:fld>
             <a:endParaRPr lang="en-CH"/>
           </a:p>
@@ -413,7 +413,7 @@
           <a:p>
             <a:fld id="{EB176464-EBC5-2646-9E5E-73A47B1E9ED9}" type="datetimeFigureOut">
               <a:rPr lang="en-CH" smtClean="0"/>
-              <a:t>05.12.2025</a:t>
+              <a:t>25.01.2026</a:t>
             </a:fld>
             <a:endParaRPr lang="en-CH"/>
           </a:p>
@@ -593,7 +593,7 @@
           <a:p>
             <a:fld id="{EB176464-EBC5-2646-9E5E-73A47B1E9ED9}" type="datetimeFigureOut">
               <a:rPr lang="en-CH" smtClean="0"/>
-              <a:t>05.12.2025</a:t>
+              <a:t>25.01.2026</a:t>
             </a:fld>
             <a:endParaRPr lang="en-CH"/>
           </a:p>
@@ -763,7 +763,7 @@
           <a:p>
             <a:fld id="{EB176464-EBC5-2646-9E5E-73A47B1E9ED9}" type="datetimeFigureOut">
               <a:rPr lang="en-CH" smtClean="0"/>
-              <a:t>05.12.2025</a:t>
+              <a:t>25.01.2026</a:t>
             </a:fld>
             <a:endParaRPr lang="en-CH"/>
           </a:p>
@@ -1007,7 +1007,7 @@
           <a:p>
             <a:fld id="{EB176464-EBC5-2646-9E5E-73A47B1E9ED9}" type="datetimeFigureOut">
               <a:rPr lang="en-CH" smtClean="0"/>
-              <a:t>05.12.2025</a:t>
+              <a:t>25.01.2026</a:t>
             </a:fld>
             <a:endParaRPr lang="en-CH"/>
           </a:p>
@@ -1239,7 +1239,7 @@
           <a:p>
             <a:fld id="{EB176464-EBC5-2646-9E5E-73A47B1E9ED9}" type="datetimeFigureOut">
               <a:rPr lang="en-CH" smtClean="0"/>
-              <a:t>05.12.2025</a:t>
+              <a:t>25.01.2026</a:t>
             </a:fld>
             <a:endParaRPr lang="en-CH"/>
           </a:p>
@@ -1606,7 +1606,7 @@
           <a:p>
             <a:fld id="{EB176464-EBC5-2646-9E5E-73A47B1E9ED9}" type="datetimeFigureOut">
               <a:rPr lang="en-CH" smtClean="0"/>
-              <a:t>05.12.2025</a:t>
+              <a:t>25.01.2026</a:t>
             </a:fld>
             <a:endParaRPr lang="en-CH"/>
           </a:p>
@@ -1724,7 +1724,7 @@
           <a:p>
             <a:fld id="{EB176464-EBC5-2646-9E5E-73A47B1E9ED9}" type="datetimeFigureOut">
               <a:rPr lang="en-CH" smtClean="0"/>
-              <a:t>05.12.2025</a:t>
+              <a:t>25.01.2026</a:t>
             </a:fld>
             <a:endParaRPr lang="en-CH"/>
           </a:p>
@@ -1819,7 +1819,7 @@
           <a:p>
             <a:fld id="{EB176464-EBC5-2646-9E5E-73A47B1E9ED9}" type="datetimeFigureOut">
               <a:rPr lang="en-CH" smtClean="0"/>
-              <a:t>05.12.2025</a:t>
+              <a:t>25.01.2026</a:t>
             </a:fld>
             <a:endParaRPr lang="en-CH"/>
           </a:p>
@@ -2096,7 +2096,7 @@
           <a:p>
             <a:fld id="{EB176464-EBC5-2646-9E5E-73A47B1E9ED9}" type="datetimeFigureOut">
               <a:rPr lang="en-CH" smtClean="0"/>
-              <a:t>05.12.2025</a:t>
+              <a:t>25.01.2026</a:t>
             </a:fld>
             <a:endParaRPr lang="en-CH"/>
           </a:p>
@@ -2353,7 +2353,7 @@
           <a:p>
             <a:fld id="{EB176464-EBC5-2646-9E5E-73A47B1E9ED9}" type="datetimeFigureOut">
               <a:rPr lang="en-CH" smtClean="0"/>
-              <a:t>05.12.2025</a:t>
+              <a:t>25.01.2026</a:t>
             </a:fld>
             <a:endParaRPr lang="en-CH"/>
           </a:p>
@@ -2566,7 +2566,7 @@
           <a:p>
             <a:fld id="{EB176464-EBC5-2646-9E5E-73A47B1E9ED9}" type="datetimeFigureOut">
               <a:rPr lang="en-CH" smtClean="0"/>
-              <a:t>05.12.2025</a:t>
+              <a:t>25.01.2026</a:t>
             </a:fld>
             <a:endParaRPr lang="en-CH"/>
           </a:p>
